--- a/Week04_OOP_Part2.pptx
+++ b/Week04_OOP_Part2.pptx
@@ -4486,8 +4486,8 @@
         </p:nvSpPr>
         <p:spPr>
           <a:xfrm>
-            <a:off x="731520" y="365760"/>
-            <a:ext cx="2743200" cy="548640"/>
+            <a:off x="731520" y="228600"/>
+            <a:ext cx="1828800" cy="502920"/>
           </a:xfrm>
           <a:prstGeom prst="rect">
             <a:avLst/>
@@ -4501,7 +4501,7 @@
           <a:lstStyle/>
           <a:p>
             <a:pPr>
-              <a:defRPr sz="2800" b="1">
+              <a:defRPr sz="2600" b="1">
                 <a:solidFill>
                   <a:srgbClr val="0EA5E9"/>
                 </a:solidFill>
@@ -4522,8 +4522,8 @@
         </p:nvSpPr>
         <p:spPr>
           <a:xfrm>
-            <a:off x="731520" y="1097280"/>
-            <a:ext cx="7680960" cy="3657600"/>
+            <a:off x="731520" y="713232"/>
+            <a:ext cx="5486400" cy="320040"/>
           </a:xfrm>
           <a:prstGeom prst="rect">
             <a:avLst/>
@@ -4531,6 +4531,42 @@
           <a:noFill/>
         </p:spPr>
         <p:txBody>
+          <a:bodyPr wrap="none">
+            <a:spAutoFit/>
+          </a:bodyPr>
+          <a:lstStyle/>
+          <a:p>
+            <a:pPr>
+              <a:defRPr sz="1300">
+                <a:solidFill>
+                  <a:srgbClr val="CADCFC"/>
+                </a:solidFill>
+                <a:latin typeface="Calibri"/>
+              </a:defRPr>
+            </a:pPr>
+            <a:r>
+              <a:t>Week 04 — 다음 질문에 답해 보세요</a:t>
+            </a:r>
+          </a:p>
+        </p:txBody>
+      </p:sp>
+      <p:sp>
+        <p:nvSpPr>
+          <p:cNvPr id="6" name="TextBox 5"/>
+          <p:cNvSpPr txBox="1"/>
+          <p:nvPr/>
+        </p:nvSpPr>
+        <p:spPr>
+          <a:xfrm>
+            <a:off x="731520" y="1115568"/>
+            <a:ext cx="5029200" cy="3474720"/>
+          </a:xfrm>
+          <a:prstGeom prst="rect">
+            <a:avLst/>
+          </a:prstGeom>
+          <a:noFill/>
+        </p:spPr>
+        <p:txBody>
           <a:bodyPr wrap="square">
             <a:spAutoFit/>
           </a:bodyPr>
@@ -4538,9 +4574,9 @@
           <a:p>
             <a:pPr>
               <a:spcAft>
-                <a:spcPts val="1400"/>
-              </a:spcAft>
-              <a:defRPr sz="1600">
+                <a:spcPts val="1000"/>
+              </a:spcAft>
+              <a:defRPr sz="1400">
                 <a:solidFill>
                   <a:srgbClr val="FFFFFF"/>
                 </a:solidFill>
@@ -4548,15 +4584,15 @@
               </a:defRPr>
             </a:pPr>
             <a:r>
-              <a:t>Q1. 자식 클래스가 부모 생성자를 호출하는 방법은?</a:t>
+              <a:t>Q1. `super(name)`은 왜 필요한가? 없으면 어떻게 되는가?</a:t>
             </a:r>
           </a:p>
           <a:p>
             <a:pPr>
               <a:spcAft>
-                <a:spcPts val="1400"/>
-              </a:spcAft>
-              <a:defRPr sz="1600">
+                <a:spcPts val="1000"/>
+              </a:spcAft>
+              <a:defRPr sz="1400">
                 <a:solidFill>
                   <a:srgbClr val="FFFFFF"/>
                 </a:solidFill>
@@ -4564,15 +4600,15 @@
               </a:defRPr>
             </a:pPr>
             <a:r>
-              <a:t>Q2. 메서드 오버라이딩의 규칙은 무엇인가?</a:t>
+              <a:t>Q2. `Employee manager = new Manager("Chris");`가 가능한 이유는 무엇인가?</a:t>
             </a:r>
           </a:p>
           <a:p>
             <a:pPr>
               <a:spcAft>
-                <a:spcPts val="1400"/>
-              </a:spcAft>
-              <a:defRPr sz="1600">
+                <a:spcPts val="1000"/>
+              </a:spcAft>
+              <a:defRPr sz="1400">
                 <a:solidFill>
                   <a:srgbClr val="FFFFFF"/>
                 </a:solidFill>
@@ -4580,15 +4616,15 @@
               </a:defRPr>
             </a:pPr>
             <a:r>
-              <a:t>Q3. 참조 타입과 실제 객체 타입이 다르면?</a:t>
+              <a:t>Q3. `animal.sound()` 호출 시 어떤 클래스의 메서드가 실제로 실행되는가?</a:t>
             </a:r>
           </a:p>
           <a:p>
             <a:pPr>
               <a:spcAft>
-                <a:spcPts val="1400"/>
-              </a:spcAft>
-              <a:defRPr sz="1600">
+                <a:spcPts val="1000"/>
+              </a:spcAft>
+              <a:defRPr sz="1400">
                 <a:solidFill>
                   <a:srgbClr val="FFFFFF"/>
                 </a:solidFill>
@@ -4596,7 +4632,173 @@
               </a:defRPr>
             </a:pPr>
             <a:r>
-              <a:t>Q4. 인터페이스는 여러 개 구현할 수 있나?</a:t>
+              <a:t>Q4. 인터페이스와 상속은 각각 어떤 상황에서 유용한가?</a:t>
+            </a:r>
+          </a:p>
+        </p:txBody>
+      </p:sp>
+      <p:sp>
+        <p:nvSpPr>
+          <p:cNvPr id="7" name="Rectangle 6"/>
+          <p:cNvSpPr/>
+          <p:nvPr/>
+        </p:nvSpPr>
+        <p:spPr>
+          <a:xfrm>
+            <a:off x="5943600" y="1115568"/>
+            <a:ext cx="27432" cy="3474720"/>
+          </a:xfrm>
+          <a:prstGeom prst="rect">
+            <a:avLst/>
+          </a:prstGeom>
+          <a:solidFill>
+            <a:srgbClr val="3B527E"/>
+          </a:solidFill>
+          <a:ln>
+            <a:noFill/>
+          </a:ln>
+        </p:spPr>
+        <p:style>
+          <a:lnRef idx="1">
+            <a:schemeClr val="accent1"/>
+          </a:lnRef>
+          <a:fillRef idx="3">
+            <a:schemeClr val="accent1"/>
+          </a:fillRef>
+          <a:effectRef idx="2">
+            <a:schemeClr val="accent1"/>
+          </a:effectRef>
+          <a:fontRef idx="minor">
+            <a:schemeClr val="lt1"/>
+          </a:fontRef>
+        </p:style>
+        <p:txBody>
+          <a:bodyPr rtlCol="0" anchor="ctr"/>
+          <a:lstStyle/>
+          <a:p>
+            <a:pPr algn="ctr"/>
+          </a:p>
+        </p:txBody>
+      </p:sp>
+      <p:sp>
+        <p:nvSpPr>
+          <p:cNvPr id="8" name="TextBox 7"/>
+          <p:cNvSpPr txBox="1"/>
+          <p:nvPr/>
+        </p:nvSpPr>
+        <p:spPr>
+          <a:xfrm>
+            <a:off x="6080760" y="1115568"/>
+            <a:ext cx="2834640" cy="365760"/>
+          </a:xfrm>
+          <a:prstGeom prst="rect">
+            <a:avLst/>
+          </a:prstGeom>
+          <a:noFill/>
+        </p:spPr>
+        <p:txBody>
+          <a:bodyPr wrap="none">
+            <a:spAutoFit/>
+          </a:bodyPr>
+          <a:lstStyle/>
+          <a:p>
+            <a:pPr>
+              <a:defRPr sz="1400" b="1">
+                <a:solidFill>
+                  <a:srgbClr val="0EA5E9"/>
+                </a:solidFill>
+                <a:latin typeface="Georgia"/>
+              </a:defRPr>
+            </a:pPr>
+            <a:r>
+              <a:t>추가 실습</a:t>
+            </a:r>
+          </a:p>
+        </p:txBody>
+      </p:sp>
+      <p:sp>
+        <p:nvSpPr>
+          <p:cNvPr id="9" name="TextBox 8"/>
+          <p:cNvSpPr txBox="1"/>
+          <p:nvPr/>
+        </p:nvSpPr>
+        <p:spPr>
+          <a:xfrm>
+            <a:off x="6080760" y="1499616"/>
+            <a:ext cx="2834640" cy="3108960"/>
+          </a:xfrm>
+          <a:prstGeom prst="rect">
+            <a:avLst/>
+          </a:prstGeom>
+          <a:noFill/>
+        </p:spPr>
+        <p:txBody>
+          <a:bodyPr wrap="square">
+            <a:spAutoFit/>
+          </a:bodyPr>
+          <a:lstStyle/>
+          <a:p>
+            <a:pPr>
+              <a:spcAft>
+                <a:spcPts val="800"/>
+              </a:spcAft>
+              <a:defRPr sz="1200">
+                <a:solidFill>
+                  <a:srgbClr val="CADCFC"/>
+                </a:solidFill>
+                <a:latin typeface="Calibri"/>
+              </a:defRPr>
+            </a:pPr>
+            <a:r>
+              <a:t>① `Employee`에 `salary` 필드를 추가하고 출력에 반영하기</a:t>
+            </a:r>
+          </a:p>
+          <a:p>
+            <a:pPr>
+              <a:spcAft>
+                <a:spcPts val="800"/>
+              </a:spcAft>
+              <a:defRPr sz="1200">
+                <a:solidFill>
+                  <a:srgbClr val="CADCFC"/>
+                </a:solidFill>
+                <a:latin typeface="Calibri"/>
+              </a:defRPr>
+            </a:pPr>
+            <a:r>
+              <a:t>② `Animal`에 `name` 필드를 추가해 소리 출력 시 이름 포함하기</a:t>
+            </a:r>
+          </a:p>
+          <a:p>
+            <a:pPr>
+              <a:spcAft>
+                <a:spcPts val="800"/>
+              </a:spcAft>
+              <a:defRPr sz="1200">
+                <a:solidFill>
+                  <a:srgbClr val="CADCFC"/>
+                </a:solidFill>
+                <a:latin typeface="Calibri"/>
+              </a:defRPr>
+            </a:pPr>
+            <a:r>
+              <a:t>③ `Defendable` 인터페이스를 추가해 `Hero`, `Monster`에 구현하기</a:t>
+            </a:r>
+          </a:p>
+          <a:p>
+            <a:pPr>
+              <a:spcAft>
+                <a:spcPts val="800"/>
+              </a:spcAft>
+              <a:defRPr sz="1200">
+                <a:solidFill>
+                  <a:srgbClr val="CADCFC"/>
+                </a:solidFill>
+                <a:latin typeface="Calibri"/>
+              </a:defRPr>
+            </a:pPr>
+            <a:r>
+              <a:t>④ 부모 타입 배열로 여러 객체를 저장하고 공통 메서드 일괄 호출하기</a:t>
             </a:r>
           </a:p>
         </p:txBody>
